--- a/q01_Open_Foam/openFoam_beta.pptx
+++ b/q01_Open_Foam/openFoam_beta.pptx
@@ -268,7 +268,7 @@
           <a:p>
             <a:fld id="{9D4686FF-3DC0-4D03-9102-64E826D8EE6E}" type="datetimeFigureOut">
               <a:rPr lang="LID4096" smtClean="0"/>
-              <a:t>09/10/2026</a:t>
+              <a:t>09/14/2026</a:t>
             </a:fld>
             <a:endParaRPr lang="LID4096"/>
           </a:p>
@@ -468,7 +468,7 @@
           <a:p>
             <a:fld id="{9D4686FF-3DC0-4D03-9102-64E826D8EE6E}" type="datetimeFigureOut">
               <a:rPr lang="LID4096" smtClean="0"/>
-              <a:t>09/10/2026</a:t>
+              <a:t>09/14/2026</a:t>
             </a:fld>
             <a:endParaRPr lang="LID4096"/>
           </a:p>
@@ -678,7 +678,7 @@
           <a:p>
             <a:fld id="{9D4686FF-3DC0-4D03-9102-64E826D8EE6E}" type="datetimeFigureOut">
               <a:rPr lang="LID4096" smtClean="0"/>
-              <a:t>09/10/2026</a:t>
+              <a:t>09/14/2026</a:t>
             </a:fld>
             <a:endParaRPr lang="LID4096"/>
           </a:p>
@@ -878,7 +878,7 @@
           <a:p>
             <a:fld id="{9D4686FF-3DC0-4D03-9102-64E826D8EE6E}" type="datetimeFigureOut">
               <a:rPr lang="LID4096" smtClean="0"/>
-              <a:t>09/10/2026</a:t>
+              <a:t>09/14/2026</a:t>
             </a:fld>
             <a:endParaRPr lang="LID4096"/>
           </a:p>
@@ -1154,7 +1154,7 @@
           <a:p>
             <a:fld id="{9D4686FF-3DC0-4D03-9102-64E826D8EE6E}" type="datetimeFigureOut">
               <a:rPr lang="LID4096" smtClean="0"/>
-              <a:t>09/10/2026</a:t>
+              <a:t>09/14/2026</a:t>
             </a:fld>
             <a:endParaRPr lang="LID4096"/>
           </a:p>
@@ -1422,7 +1422,7 @@
           <a:p>
             <a:fld id="{9D4686FF-3DC0-4D03-9102-64E826D8EE6E}" type="datetimeFigureOut">
               <a:rPr lang="LID4096" smtClean="0"/>
-              <a:t>09/10/2026</a:t>
+              <a:t>09/14/2026</a:t>
             </a:fld>
             <a:endParaRPr lang="LID4096"/>
           </a:p>
@@ -1837,7 +1837,7 @@
           <a:p>
             <a:fld id="{9D4686FF-3DC0-4D03-9102-64E826D8EE6E}" type="datetimeFigureOut">
               <a:rPr lang="LID4096" smtClean="0"/>
-              <a:t>09/10/2026</a:t>
+              <a:t>09/14/2026</a:t>
             </a:fld>
             <a:endParaRPr lang="LID4096"/>
           </a:p>
@@ -1979,7 +1979,7 @@
           <a:p>
             <a:fld id="{9D4686FF-3DC0-4D03-9102-64E826D8EE6E}" type="datetimeFigureOut">
               <a:rPr lang="LID4096" smtClean="0"/>
-              <a:t>09/10/2026</a:t>
+              <a:t>09/14/2026</a:t>
             </a:fld>
             <a:endParaRPr lang="LID4096"/>
           </a:p>
@@ -2092,7 +2092,7 @@
           <a:p>
             <a:fld id="{9D4686FF-3DC0-4D03-9102-64E826D8EE6E}" type="datetimeFigureOut">
               <a:rPr lang="LID4096" smtClean="0"/>
-              <a:t>09/10/2026</a:t>
+              <a:t>09/14/2026</a:t>
             </a:fld>
             <a:endParaRPr lang="LID4096"/>
           </a:p>
@@ -2405,7 +2405,7 @@
           <a:p>
             <a:fld id="{9D4686FF-3DC0-4D03-9102-64E826D8EE6E}" type="datetimeFigureOut">
               <a:rPr lang="LID4096" smtClean="0"/>
-              <a:t>09/10/2026</a:t>
+              <a:t>09/14/2026</a:t>
             </a:fld>
             <a:endParaRPr lang="LID4096"/>
           </a:p>
@@ -2694,7 +2694,7 @@
           <a:p>
             <a:fld id="{9D4686FF-3DC0-4D03-9102-64E826D8EE6E}" type="datetimeFigureOut">
               <a:rPr lang="LID4096" smtClean="0"/>
-              <a:t>09/10/2026</a:t>
+              <a:t>09/14/2026</a:t>
             </a:fld>
             <a:endParaRPr lang="LID4096"/>
           </a:p>
@@ -2937,7 +2937,7 @@
           <a:p>
             <a:fld id="{9D4686FF-3DC0-4D03-9102-64E826D8EE6E}" type="datetimeFigureOut">
               <a:rPr lang="LID4096" smtClean="0"/>
-              <a:t>09/10/2026</a:t>
+              <a:t>09/14/2026</a:t>
             </a:fld>
             <a:endParaRPr lang="LID4096"/>
           </a:p>
@@ -3456,7 +3456,7 @@
               <a:rPr lang="en-GB" sz="2800" b="1" i="0" u="none" strike="noStrike" baseline="0" dirty="0">
                 <a:latin typeface="LMRoman12-Regular"/>
               </a:rPr>
-              <a:t>anipulation</a:t>
+              <a:t>anipulation </a:t>
             </a:r>
             <a:endParaRPr lang="LID4096" sz="2800" b="1" dirty="0"/>
           </a:p>
@@ -9586,8 +9586,8 @@
           </a:effectLst>
         </p:spPr>
       </p:pic>
-      <mc:AlternateContent xmlns:mc="http://schemas.openxmlformats.org/markup-compatibility/2006">
-        <mc:Choice xmlns:a14="http://schemas.microsoft.com/office/drawing/2010/main" Requires="a14">
+      <mc:AlternateContent xmlns:mc="http://schemas.openxmlformats.org/markup-compatibility/2006" xmlns:a14="http://schemas.microsoft.com/office/drawing/2010/main">
+        <mc:Choice Requires="a14">
           <p:sp>
             <p:nvSpPr>
               <p:cNvPr id="9" name="TextBox 8">
@@ -9616,6 +9616,7 @@
               </a:bodyPr>
               <a:lstStyle/>
               <a:p>
+                <a:pPr/>
                 <a14:m>
                   <m:oMathPara xmlns:m="http://schemas.openxmlformats.org/officeDocument/2006/math">
                     <m:oMathParaPr>
@@ -9670,7 +9671,7 @@
             </p:txBody>
           </p:sp>
         </mc:Choice>
-        <mc:Fallback>
+        <mc:Fallback xmlns="">
           <p:sp>
             <p:nvSpPr>
               <p:cNvPr id="9" name="TextBox 8">
@@ -9715,8 +9716,8 @@
           </p:sp>
         </mc:Fallback>
       </mc:AlternateContent>
-      <mc:AlternateContent xmlns:mc="http://schemas.openxmlformats.org/markup-compatibility/2006">
-        <mc:Choice xmlns:a14="http://schemas.microsoft.com/office/drawing/2010/main" Requires="a14">
+      <mc:AlternateContent xmlns:mc="http://schemas.openxmlformats.org/markup-compatibility/2006" xmlns:a14="http://schemas.microsoft.com/office/drawing/2010/main">
+        <mc:Choice Requires="a14">
           <p:sp>
             <p:nvSpPr>
               <p:cNvPr id="10" name="TextBox 9">
@@ -9789,7 +9790,7 @@
             </p:txBody>
           </p:sp>
         </mc:Choice>
-        <mc:Fallback>
+        <mc:Fallback xmlns="">
           <p:sp>
             <p:nvSpPr>
               <p:cNvPr id="10" name="TextBox 9">
@@ -9834,8 +9835,8 @@
           </p:sp>
         </mc:Fallback>
       </mc:AlternateContent>
-      <mc:AlternateContent xmlns:mc="http://schemas.openxmlformats.org/markup-compatibility/2006">
-        <mc:Choice xmlns:a14="http://schemas.microsoft.com/office/drawing/2010/main" Requires="a14">
+      <mc:AlternateContent xmlns:mc="http://schemas.openxmlformats.org/markup-compatibility/2006" xmlns:a14="http://schemas.microsoft.com/office/drawing/2010/main">
+        <mc:Choice Requires="a14">
           <p:sp>
             <p:nvSpPr>
               <p:cNvPr id="11" name="TextBox 10">
@@ -9864,6 +9865,7 @@
               </a:bodyPr>
               <a:lstStyle/>
               <a:p>
+                <a:pPr/>
                 <a14:m>
                   <m:oMathPara xmlns:m="http://schemas.openxmlformats.org/officeDocument/2006/math">
                     <m:oMathParaPr>
@@ -9931,7 +9933,7 @@
             </p:txBody>
           </p:sp>
         </mc:Choice>
-        <mc:Fallback>
+        <mc:Fallback xmlns="">
           <p:sp>
             <p:nvSpPr>
               <p:cNvPr id="11" name="TextBox 10">

--- a/q01_Open_Foam/openFoam_beta.pptx
+++ b/q01_Open_Foam/openFoam_beta.pptx
@@ -13,6 +13,7 @@
     <p:sldId id="263" r:id="rId7"/>
     <p:sldId id="264" r:id="rId8"/>
     <p:sldId id="265" r:id="rId9"/>
+    <p:sldId id="266" r:id="rId10"/>
   </p:sldIdLst>
   <p:sldSz cx="12192000" cy="6858000"/>
   <p:notesSz cx="6858000" cy="9144000"/>
@@ -6187,8 +6188,8 @@
         </p:blipFill>
         <p:spPr>
           <a:xfrm>
-            <a:off x="9845949" y="4008000"/>
-            <a:ext cx="1400793" cy="831290"/>
+            <a:off x="4798952" y="4906978"/>
+            <a:ext cx="1820288" cy="1080236"/>
           </a:xfrm>
           <a:prstGeom prst="rect">
             <a:avLst/>
@@ -6209,7 +6210,7 @@
         </p:nvSpPr>
         <p:spPr>
           <a:xfrm>
-            <a:off x="11066078" y="4649504"/>
+            <a:off x="6417884" y="5833179"/>
             <a:ext cx="447996" cy="338554"/>
           </a:xfrm>
           <a:prstGeom prst="rect">
@@ -6501,6 +6502,46 @@
           </p:txBody>
         </p:sp>
       </p:grpSp>
+      <p:sp>
+        <p:nvSpPr>
+          <p:cNvPr id="10" name="TextBox 9">
+            <a:extLst>
+              <a:ext uri="{FF2B5EF4-FFF2-40B4-BE49-F238E27FC236}">
+                <a16:creationId xmlns:a16="http://schemas.microsoft.com/office/drawing/2014/main" id="{ABD56200-2A27-3CEB-EF8B-8D037611EDBF}"/>
+              </a:ext>
+            </a:extLst>
+          </p:cNvPr>
+          <p:cNvSpPr txBox="1"/>
+          <p:nvPr/>
+        </p:nvSpPr>
+        <p:spPr>
+          <a:xfrm>
+            <a:off x="4997513" y="3696721"/>
+            <a:ext cx="6809091" cy="646331"/>
+          </a:xfrm>
+          <a:prstGeom prst="rect">
+            <a:avLst/>
+          </a:prstGeom>
+          <a:noFill/>
+        </p:spPr>
+        <p:txBody>
+          <a:bodyPr wrap="square">
+            <a:spAutoFit/>
+          </a:bodyPr>
+          <a:lstStyle/>
+          <a:p>
+            <a:pPr algn="ctr"/>
+            <a:r>
+              <a:rPr lang="LID4096" dirty="0">
+                <a:solidFill>
+                  <a:srgbClr val="0000FF"/>
+                </a:solidFill>
+              </a:rPr>
+              <a:t>||05a| transport || solver || NEW discretization fvSchemes || blockMesh | setFields | nano foam.foam | paraview foam.foam &amp;</a:t>
+            </a:r>
+          </a:p>
+        </p:txBody>
+      </p:sp>
     </p:spTree>
     <p:extLst>
       <p:ext uri="{BB962C8B-B14F-4D97-AF65-F5344CB8AC3E}">
@@ -6720,10 +6761,10 @@
         </p:nvGrpSpPr>
         <p:grpSpPr>
           <a:xfrm>
-            <a:off x="-787541" y="0"/>
-            <a:ext cx="8386978" cy="4655175"/>
-            <a:chOff x="-608432" y="573115"/>
-            <a:chExt cx="8386978" cy="4655175"/>
+            <a:off x="-742523" y="0"/>
+            <a:ext cx="8689952" cy="5164358"/>
+            <a:chOff x="-563414" y="573115"/>
+            <a:chExt cx="8689952" cy="5164358"/>
           </a:xfrm>
         </p:grpSpPr>
         <p:sp>
@@ -7092,7 +7133,7 @@
           </p:nvSpPr>
           <p:spPr>
             <a:xfrm>
-              <a:off x="2192901" y="595315"/>
+              <a:off x="2540893" y="651675"/>
               <a:ext cx="2346130" cy="2688557"/>
             </a:xfrm>
             <a:prstGeom prst="rect">
@@ -7454,7 +7495,7 @@
           </p:nvSpPr>
           <p:spPr>
             <a:xfrm>
-              <a:off x="4413453" y="595315"/>
+              <a:off x="4761445" y="651675"/>
               <a:ext cx="3365093" cy="2470548"/>
             </a:xfrm>
             <a:prstGeom prst="rect">
@@ -7835,7 +7876,7 @@
           </p:nvSpPr>
           <p:spPr>
             <a:xfrm>
-              <a:off x="-608432" y="3411767"/>
+              <a:off x="-563414" y="3920950"/>
               <a:ext cx="3309488" cy="1816523"/>
             </a:xfrm>
             <a:prstGeom prst="rect">
@@ -8353,6 +8394,152 @@
           </p:txBody>
         </p:sp>
       </p:grpSp>
+      <p:cxnSp>
+        <p:nvCxnSpPr>
+          <p:cNvPr id="7" name="Straight Connector 6">
+            <a:extLst>
+              <a:ext uri="{FF2B5EF4-FFF2-40B4-BE49-F238E27FC236}">
+                <a16:creationId xmlns:a16="http://schemas.microsoft.com/office/drawing/2014/main" id="{0A76E27F-58C4-6091-1511-B83D9CAE4C9A}"/>
+              </a:ext>
+            </a:extLst>
+          </p:cNvPr>
+          <p:cNvCxnSpPr/>
+          <p:nvPr/>
+        </p:nvCxnSpPr>
+        <p:spPr>
+          <a:xfrm>
+            <a:off x="2281471" y="0"/>
+            <a:ext cx="0" cy="2976420"/>
+          </a:xfrm>
+          <a:prstGeom prst="line">
+            <a:avLst/>
+          </a:prstGeom>
+          <a:ln>
+            <a:solidFill>
+              <a:schemeClr val="tx1"/>
+            </a:solidFill>
+          </a:ln>
+          <a:effectLst>
+            <a:outerShdw blurRad="50800" dist="38100" dir="8100000" algn="tr" rotWithShape="0">
+              <a:prstClr val="black">
+                <a:alpha val="40000"/>
+              </a:prstClr>
+            </a:outerShdw>
+          </a:effectLst>
+        </p:spPr>
+        <p:style>
+          <a:lnRef idx="1">
+            <a:schemeClr val="accent1"/>
+          </a:lnRef>
+          <a:fillRef idx="0">
+            <a:schemeClr val="accent1"/>
+          </a:fillRef>
+          <a:effectRef idx="0">
+            <a:schemeClr val="accent1"/>
+          </a:effectRef>
+          <a:fontRef idx="minor">
+            <a:schemeClr val="tx1"/>
+          </a:fontRef>
+        </p:style>
+      </p:cxnSp>
+      <p:cxnSp>
+        <p:nvCxnSpPr>
+          <p:cNvPr id="3" name="Straight Connector 2">
+            <a:extLst>
+              <a:ext uri="{FF2B5EF4-FFF2-40B4-BE49-F238E27FC236}">
+                <a16:creationId xmlns:a16="http://schemas.microsoft.com/office/drawing/2014/main" id="{24EDE8D1-3239-DB4A-B09E-29C069858595}"/>
+              </a:ext>
+            </a:extLst>
+          </p:cNvPr>
+          <p:cNvCxnSpPr/>
+          <p:nvPr/>
+        </p:nvCxnSpPr>
+        <p:spPr>
+          <a:xfrm>
+            <a:off x="4582336" y="0"/>
+            <a:ext cx="0" cy="2976420"/>
+          </a:xfrm>
+          <a:prstGeom prst="line">
+            <a:avLst/>
+          </a:prstGeom>
+          <a:ln>
+            <a:solidFill>
+              <a:schemeClr val="tx1"/>
+            </a:solidFill>
+          </a:ln>
+          <a:effectLst>
+            <a:outerShdw blurRad="50800" dist="38100" dir="8100000" algn="tr" rotWithShape="0">
+              <a:prstClr val="black">
+                <a:alpha val="40000"/>
+              </a:prstClr>
+            </a:outerShdw>
+          </a:effectLst>
+        </p:spPr>
+        <p:style>
+          <a:lnRef idx="1">
+            <a:schemeClr val="accent1"/>
+          </a:lnRef>
+          <a:fillRef idx="0">
+            <a:schemeClr val="accent1"/>
+          </a:fillRef>
+          <a:effectRef idx="0">
+            <a:schemeClr val="accent1"/>
+          </a:effectRef>
+          <a:fontRef idx="minor">
+            <a:schemeClr val="tx1"/>
+          </a:fontRef>
+        </p:style>
+      </p:cxnSp>
+      <p:cxnSp>
+        <p:nvCxnSpPr>
+          <p:cNvPr id="4" name="Straight Connector 3">
+            <a:extLst>
+              <a:ext uri="{FF2B5EF4-FFF2-40B4-BE49-F238E27FC236}">
+                <a16:creationId xmlns:a16="http://schemas.microsoft.com/office/drawing/2014/main" id="{5DBD1C8D-951E-C8EA-6716-8A1B749DBEE3}"/>
+              </a:ext>
+            </a:extLst>
+          </p:cNvPr>
+          <p:cNvCxnSpPr>
+            <a:cxnSpLocks/>
+          </p:cNvCxnSpPr>
+          <p:nvPr/>
+        </p:nvCxnSpPr>
+        <p:spPr>
+          <a:xfrm flipH="1">
+            <a:off x="-1" y="3223369"/>
+            <a:ext cx="2651760" cy="0"/>
+          </a:xfrm>
+          <a:prstGeom prst="line">
+            <a:avLst/>
+          </a:prstGeom>
+          <a:ln>
+            <a:solidFill>
+              <a:schemeClr val="tx1"/>
+            </a:solidFill>
+          </a:ln>
+          <a:effectLst>
+            <a:outerShdw blurRad="50800" dist="38100" dir="8100000" algn="tr" rotWithShape="0">
+              <a:prstClr val="black">
+                <a:alpha val="40000"/>
+              </a:prstClr>
+            </a:outerShdw>
+          </a:effectLst>
+        </p:spPr>
+        <p:style>
+          <a:lnRef idx="1">
+            <a:schemeClr val="accent1"/>
+          </a:lnRef>
+          <a:fillRef idx="0">
+            <a:schemeClr val="accent1"/>
+          </a:fillRef>
+          <a:effectRef idx="0">
+            <a:schemeClr val="accent1"/>
+          </a:effectRef>
+          <a:fontRef idx="minor">
+            <a:schemeClr val="tx1"/>
+          </a:fontRef>
+        </p:style>
+      </p:cxnSp>
     </p:spTree>
     <p:extLst>
       <p:ext uri="{BB962C8B-B14F-4D97-AF65-F5344CB8AC3E}">
@@ -12176,6 +12363,75 @@
 </p:sld>
 </file>
 
+<file path=ppt/slides/slide9.xml><?xml version="1.0" encoding="utf-8"?>
+<p:sld xmlns:a="http://schemas.openxmlformats.org/drawingml/2006/main" xmlns:r="http://schemas.openxmlformats.org/officeDocument/2006/relationships" xmlns:p="http://schemas.openxmlformats.org/presentationml/2006/main">
+  <p:cSld>
+    <p:spTree>
+      <p:nvGrpSpPr>
+        <p:cNvPr id="1" name=""/>
+        <p:cNvGrpSpPr/>
+        <p:nvPr/>
+      </p:nvGrpSpPr>
+      <p:grpSpPr>
+        <a:xfrm>
+          <a:off x="0" y="0"/>
+          <a:ext cx="0" cy="0"/>
+          <a:chOff x="0" y="0"/>
+          <a:chExt cx="0" cy="0"/>
+        </a:xfrm>
+      </p:grpSpPr>
+      <p:sp>
+        <p:nvSpPr>
+          <p:cNvPr id="5" name="TextBox 4">
+            <a:extLst>
+              <a:ext uri="{FF2B5EF4-FFF2-40B4-BE49-F238E27FC236}">
+                <a16:creationId xmlns:a16="http://schemas.microsoft.com/office/drawing/2014/main" id="{E2AE8678-7B4E-9F27-8355-B39CE8F07171}"/>
+              </a:ext>
+            </a:extLst>
+          </p:cNvPr>
+          <p:cNvSpPr txBox="1"/>
+          <p:nvPr/>
+        </p:nvSpPr>
+        <p:spPr>
+          <a:xfrm>
+            <a:off x="106379" y="93294"/>
+            <a:ext cx="6097508" cy="369332"/>
+          </a:xfrm>
+          <a:prstGeom prst="rect">
+            <a:avLst/>
+          </a:prstGeom>
+          <a:noFill/>
+        </p:spPr>
+        <p:txBody>
+          <a:bodyPr wrap="square">
+            <a:spAutoFit/>
+          </a:bodyPr>
+          <a:lstStyle/>
+          <a:p>
+            <a:r>
+              <a:rPr lang="LID4096" dirty="0">
+                <a:solidFill>
+                  <a:srgbClr val="0000FF"/>
+                </a:solidFill>
+              </a:rPr>
+              <a:t>https://www.youtube.com/watch?v=jfDzFPaPPug           ||06|| </a:t>
+            </a:r>
+          </a:p>
+        </p:txBody>
+      </p:sp>
+    </p:spTree>
+    <p:extLst>
+      <p:ext uri="{BB962C8B-B14F-4D97-AF65-F5344CB8AC3E}">
+        <p14:creationId xmlns:p14="http://schemas.microsoft.com/office/powerpoint/2010/main" val="342490078"/>
+      </p:ext>
+    </p:extLst>
+  </p:cSld>
+  <p:clrMapOvr>
+    <a:masterClrMapping/>
+  </p:clrMapOvr>
+</p:sld>
+</file>
+
 <file path=ppt/theme/theme1.xml><?xml version="1.0" encoding="utf-8"?>
 <a:theme xmlns:a="http://schemas.openxmlformats.org/drawingml/2006/main" name="Office Theme">
   <a:themeElements>
